--- a/dist/초4/국어/읽기와요약/초4_국어_읽기와요약_03_중심내용간추리기_학생용.pptx
+++ b/dist/초4/국어/읽기와요약/초4_국어_읽기와요약_03_중심내용간추리기_학생용.pptx
@@ -119,13 +119,13 @@
   <p:extLst>
     <p:ext uri="{521415D9-36F7-43E2-AB2F-B90AF26B5E84}">
       <p14:sectionLst xmlns:p14="http://schemas.microsoft.com/office/powerpoint/2010/main">
-        <p14:section name="도입" id="{0f23d837-8ada-5b43-497f-2985cb190082}">
+        <p14:section name="도입" id="{aa38c70e-d3c0-d374-fa64-db37db6267c0}">
           <p14:sldIdLst>
             <p14:sldId id="256"/>
             <p14:sldId id="257"/>
           </p14:sldIdLst>
         </p14:section>
-        <p14:section name="개념" id="{12ca5659-ac60-99f9-f2c3-2ab31b6f89f6}">
+        <p14:section name="개념" id="{b18683b6-f69a-4824-3131-567a524e2e2d}">
           <p14:sldIdLst>
             <p14:sldId id="258"/>
             <p14:sldId id="259"/>
@@ -134,24 +134,24 @@
             <p14:sldId id="262"/>
           </p14:sldIdLst>
         </p14:section>
-        <p14:section name="연습" id="{91897525-643e-5d80-283b-529e0f6b998d}">
+        <p14:section name="연습" id="{9eaa31c9-254a-ac36-ae85-c450d144064e}">
           <p14:sldIdLst>
             <p14:sldId id="263"/>
             <p14:sldId id="264"/>
           </p14:sldIdLst>
         </p14:section>
-        <p14:section name="확인" id="{0b3f98ee-95b2-f6a1-d612-26320b84ec81}">
+        <p14:section name="확인" id="{68a35e97-e1ff-ac98-dc2f-ca25845ac09e}">
           <p14:sldIdLst>
             <p14:sldId id="265"/>
             <p14:sldId id="266"/>
           </p14:sldIdLst>
         </p14:section>
-        <p14:section name="정리" id="{cd85a0ba-3e6c-ea13-a4dd-218974dd34dd}">
+        <p14:section name="정리" id="{dadfe033-5c0a-836f-5ac1-6448300d4bc5}">
           <p14:sldIdLst>
             <p14:sldId id="267"/>
           </p14:sldIdLst>
         </p14:section>
-        <p14:section name="보충" id="{c2c7fdec-00e1-183c-b46c-81b952f53cae}">
+        <p14:section name="보충" id="{0530d5a6-48ce-45a6-74c2-f531f56b9d0d}">
           <p14:sldIdLst>
             <p14:sldId id="268"/>
           </p14:sldIdLst>
@@ -6535,7 +6535,7 @@
           </p:nvPr>
         </p:nvGraphicFramePr>
         <p:xfrm>
-          <a:off x="1522476" y="1971548"/>
+          <a:off x="1522476" y="2004568"/>
           <a:ext cx="9144000" cy="914400"/>
         </p:xfrm>
         <a:graphic>
@@ -6546,7 +6546,7 @@
                 <a:gridCol w="1280160"/>
                 <a:gridCol w="7863840"/>
               </a:tblGrid>
-              <a:tr h="528320">
+              <a:tr h="511810">
                 <a:tc>
                   <a:txBody>
                     <a:bodyPr/>
@@ -6684,7 +6684,7 @@
                   </a:tcPr>
                 </a:tc>
               </a:tr>
-              <a:tr h="528320">
+              <a:tr h="511810">
                 <a:tc>
                   <a:txBody>
                     <a:bodyPr/>
@@ -6822,7 +6822,7 @@
                   </a:tcPr>
                 </a:tc>
               </a:tr>
-              <a:tr h="528320">
+              <a:tr h="511810">
                 <a:tc>
                   <a:txBody>
                     <a:bodyPr/>
@@ -6960,7 +6960,7 @@
                   </a:tcPr>
                 </a:tc>
               </a:tr>
-              <a:tr h="528320">
+              <a:tr h="511810">
                 <a:tc>
                   <a:txBody>
                     <a:bodyPr/>
